--- a/IconosOri.pptx
+++ b/IconosOri.pptx
@@ -6,6 +6,9 @@
   </p:sldMasterIdLst>
   <p:sldIdLst>
     <p:sldId id="257" r:id="rId2"/>
+    <p:sldId id="258" r:id="rId3"/>
+    <p:sldId id="259" r:id="rId4"/>
+    <p:sldId id="260" r:id="rId5"/>
   </p:sldIdLst>
   <p:sldSz cx="12192000" cy="6858000"/>
   <p:notesSz cx="6858000" cy="9144000"/>
@@ -104,6 +107,11 @@
       </a:defRPr>
     </a:lvl9pPr>
   </p:defaultTextStyle>
+  <p:extLst>
+    <p:ext uri="{EFAFB233-063F-42B5-8137-9DF3F51BA10A}">
+      <p15:sldGuideLst xmlns:p15="http://schemas.microsoft.com/office/powerpoint/2012/main"/>
+    </p:ext>
+  </p:extLst>
 </p:presentation>
 </file>
 
@@ -3343,7 +3351,7 @@
         </p:blipFill>
         <p:spPr>
           <a:xfrm>
-            <a:off x="0" y="208280"/>
+            <a:off x="0" y="901957"/>
             <a:ext cx="2438400" cy="2438400"/>
           </a:xfrm>
           <a:prstGeom prst="rect">
@@ -3373,7 +3381,329 @@
         </p:blipFill>
         <p:spPr>
           <a:xfrm>
-            <a:off x="2438400" y="0"/>
+            <a:off x="2438400" y="901957"/>
+            <a:ext cx="2438400" cy="2438400"/>
+          </a:xfrm>
+          <a:prstGeom prst="rect">
+            <a:avLst/>
+          </a:prstGeom>
+        </p:spPr>
+      </p:pic>
+      <p:sp>
+        <p:nvSpPr>
+          <p:cNvPr id="2" name="CuadroTexto 1">
+            <a:extLst>
+              <a:ext uri="{FF2B5EF4-FFF2-40B4-BE49-F238E27FC236}">
+                <a16:creationId xmlns:a16="http://schemas.microsoft.com/office/drawing/2014/main" id="{844AAB26-0785-C544-56E5-B19ECA8E28E6}"/>
+              </a:ext>
+            </a:extLst>
+          </p:cNvPr>
+          <p:cNvSpPr txBox="1"/>
+          <p:nvPr/>
+        </p:nvSpPr>
+        <p:spPr>
+          <a:xfrm>
+            <a:off x="252984" y="139962"/>
+            <a:ext cx="2542032" cy="584775"/>
+          </a:xfrm>
+          <a:prstGeom prst="rect">
+            <a:avLst/>
+          </a:prstGeom>
+          <a:noFill/>
+        </p:spPr>
+        <p:txBody>
+          <a:bodyPr wrap="square" rtlCol="0">
+            <a:spAutoFit/>
+          </a:bodyPr>
+          <a:lstStyle/>
+          <a:p>
+            <a:r>
+              <a:rPr lang="es-ES" sz="3200" dirty="0">
+                <a:latin typeface="Algerian" panose="04020705040A02060702" pitchFamily="82" charset="0"/>
+              </a:rPr>
+              <a:t>SKILLS</a:t>
+            </a:r>
+          </a:p>
+        </p:txBody>
+      </p:sp>
+      <p:pic>
+        <p:nvPicPr>
+          <p:cNvPr id="5" name="Imagen 4">
+            <a:extLst>
+              <a:ext uri="{FF2B5EF4-FFF2-40B4-BE49-F238E27FC236}">
+                <a16:creationId xmlns:a16="http://schemas.microsoft.com/office/drawing/2014/main" id="{DCEDD87C-A64A-DB92-22CB-5CB7CA4C47F6}"/>
+              </a:ext>
+            </a:extLst>
+          </p:cNvPr>
+          <p:cNvPicPr>
+            <a:picLocks noChangeAspect="1"/>
+          </p:cNvPicPr>
+          <p:nvPr/>
+        </p:nvPicPr>
+        <p:blipFill>
+          <a:blip r:embed="rId4"/>
+          <a:stretch>
+            <a:fillRect/>
+          </a:stretch>
+        </p:blipFill>
+        <p:spPr>
+          <a:xfrm>
+            <a:off x="4876800" y="901957"/>
+            <a:ext cx="2438400" cy="2438400"/>
+          </a:xfrm>
+          <a:prstGeom prst="rect">
+            <a:avLst/>
+          </a:prstGeom>
+        </p:spPr>
+      </p:pic>
+      <p:pic>
+        <p:nvPicPr>
+          <p:cNvPr id="10" name="Imagen 9">
+            <a:extLst>
+              <a:ext uri="{FF2B5EF4-FFF2-40B4-BE49-F238E27FC236}">
+                <a16:creationId xmlns:a16="http://schemas.microsoft.com/office/drawing/2014/main" id="{1D828534-E66D-1B09-368B-8503D6508388}"/>
+              </a:ext>
+            </a:extLst>
+          </p:cNvPr>
+          <p:cNvPicPr>
+            <a:picLocks noChangeAspect="1"/>
+          </p:cNvPicPr>
+          <p:nvPr/>
+        </p:nvPicPr>
+        <p:blipFill>
+          <a:blip r:embed="rId5"/>
+          <a:stretch>
+            <a:fillRect/>
+          </a:stretch>
+        </p:blipFill>
+        <p:spPr>
+          <a:xfrm>
+            <a:off x="7315200" y="901957"/>
+            <a:ext cx="2438400" cy="2438400"/>
+          </a:xfrm>
+          <a:prstGeom prst="rect">
+            <a:avLst/>
+          </a:prstGeom>
+        </p:spPr>
+      </p:pic>
+      <p:pic>
+        <p:nvPicPr>
+          <p:cNvPr id="13" name="Imagen 12">
+            <a:extLst>
+              <a:ext uri="{FF2B5EF4-FFF2-40B4-BE49-F238E27FC236}">
+                <a16:creationId xmlns:a16="http://schemas.microsoft.com/office/drawing/2014/main" id="{0F0D576B-4BE5-21DD-5363-8B8B95C8A36E}"/>
+              </a:ext>
+            </a:extLst>
+          </p:cNvPr>
+          <p:cNvPicPr>
+            <a:picLocks noChangeAspect="1"/>
+          </p:cNvPicPr>
+          <p:nvPr/>
+        </p:nvPicPr>
+        <p:blipFill>
+          <a:blip r:embed="rId6"/>
+          <a:stretch>
+            <a:fillRect/>
+          </a:stretch>
+        </p:blipFill>
+        <p:spPr>
+          <a:xfrm>
+            <a:off x="9732264" y="901957"/>
+            <a:ext cx="2438400" cy="2438400"/>
+          </a:xfrm>
+          <a:prstGeom prst="rect">
+            <a:avLst/>
+          </a:prstGeom>
+        </p:spPr>
+      </p:pic>
+      <p:pic>
+        <p:nvPicPr>
+          <p:cNvPr id="16" name="Imagen 15">
+            <a:extLst>
+              <a:ext uri="{FF2B5EF4-FFF2-40B4-BE49-F238E27FC236}">
+                <a16:creationId xmlns:a16="http://schemas.microsoft.com/office/drawing/2014/main" id="{908189DE-3E1B-734A-6B43-C9727EBAAEE0}"/>
+              </a:ext>
+            </a:extLst>
+          </p:cNvPr>
+          <p:cNvPicPr>
+            <a:picLocks noChangeAspect="1"/>
+          </p:cNvPicPr>
+          <p:nvPr/>
+        </p:nvPicPr>
+        <p:blipFill>
+          <a:blip r:embed="rId7"/>
+          <a:stretch>
+            <a:fillRect/>
+          </a:stretch>
+        </p:blipFill>
+        <p:spPr>
+          <a:xfrm>
+            <a:off x="21336" y="3340357"/>
+            <a:ext cx="2438400" cy="2438400"/>
+          </a:xfrm>
+          <a:prstGeom prst="rect">
+            <a:avLst/>
+          </a:prstGeom>
+        </p:spPr>
+      </p:pic>
+      <p:sp>
+        <p:nvSpPr>
+          <p:cNvPr id="17" name="AutoShape 10" descr="AbilityIcon_Grapple">
+            <a:extLst>
+              <a:ext uri="{FF2B5EF4-FFF2-40B4-BE49-F238E27FC236}">
+                <a16:creationId xmlns:a16="http://schemas.microsoft.com/office/drawing/2014/main" id="{153C4F4F-F3FA-DABB-E365-B6C63AD0A903}"/>
+              </a:ext>
+            </a:extLst>
+          </p:cNvPr>
+          <p:cNvSpPr>
+            <a:spLocks noChangeAspect="1" noChangeArrowheads="1"/>
+          </p:cNvSpPr>
+          <p:nvPr/>
+        </p:nvSpPr>
+        <p:spPr bwMode="auto">
+          <a:xfrm>
+            <a:off x="5943600" y="3276600"/>
+            <a:ext cx="304800" cy="304800"/>
+          </a:xfrm>
+          <a:prstGeom prst="rect">
+            <a:avLst/>
+          </a:prstGeom>
+          <a:noFill/>
+          <a:extLst>
+            <a:ext uri="{909E8E84-426E-40DD-AFC4-6F175D3DCCD1}">
+              <a14:hiddenFill xmlns:a14="http://schemas.microsoft.com/office/drawing/2010/main">
+                <a:solidFill>
+                  <a:srgbClr val="FFFFFF"/>
+                </a:solidFill>
+              </a14:hiddenFill>
+            </a:ext>
+          </a:extLst>
+        </p:spPr>
+        <p:txBody>
+          <a:bodyPr vert="horz" wrap="square" lIns="91440" tIns="45720" rIns="91440" bIns="45720" numCol="1" anchor="t" anchorCtr="0" compatLnSpc="1">
+            <a:prstTxWarp prst="textNoShape">
+              <a:avLst/>
+            </a:prstTxWarp>
+          </a:bodyPr>
+          <a:lstStyle/>
+          <a:p>
+            <a:endParaRPr lang="es-ES" dirty="0"/>
+          </a:p>
+        </p:txBody>
+      </p:sp>
+      <p:pic>
+        <p:nvPicPr>
+          <p:cNvPr id="20" name="Imagen 19">
+            <a:extLst>
+              <a:ext uri="{FF2B5EF4-FFF2-40B4-BE49-F238E27FC236}">
+                <a16:creationId xmlns:a16="http://schemas.microsoft.com/office/drawing/2014/main" id="{559EEDE7-8513-5019-7137-91AF11BDF283}"/>
+              </a:ext>
+            </a:extLst>
+          </p:cNvPr>
+          <p:cNvPicPr>
+            <a:picLocks noChangeAspect="1"/>
+          </p:cNvPicPr>
+          <p:nvPr/>
+        </p:nvPicPr>
+        <p:blipFill>
+          <a:blip r:embed="rId8"/>
+          <a:stretch>
+            <a:fillRect/>
+          </a:stretch>
+        </p:blipFill>
+        <p:spPr>
+          <a:xfrm>
+            <a:off x="2436315" y="3429000"/>
+            <a:ext cx="2438400" cy="2438400"/>
+          </a:xfrm>
+          <a:prstGeom prst="rect">
+            <a:avLst/>
+          </a:prstGeom>
+        </p:spPr>
+      </p:pic>
+      <p:pic>
+        <p:nvPicPr>
+          <p:cNvPr id="23" name="Imagen 22">
+            <a:extLst>
+              <a:ext uri="{FF2B5EF4-FFF2-40B4-BE49-F238E27FC236}">
+                <a16:creationId xmlns:a16="http://schemas.microsoft.com/office/drawing/2014/main" id="{DA5E75F1-E7B8-4819-974D-AD885E379A6A}"/>
+              </a:ext>
+            </a:extLst>
+          </p:cNvPr>
+          <p:cNvPicPr>
+            <a:picLocks noChangeAspect="1"/>
+          </p:cNvPicPr>
+          <p:nvPr/>
+        </p:nvPicPr>
+        <p:blipFill>
+          <a:blip r:embed="rId9"/>
+          <a:stretch>
+            <a:fillRect/>
+          </a:stretch>
+        </p:blipFill>
+        <p:spPr>
+          <a:xfrm>
+            <a:off x="4874715" y="3429000"/>
+            <a:ext cx="2438400" cy="2438400"/>
+          </a:xfrm>
+          <a:prstGeom prst="rect">
+            <a:avLst/>
+          </a:prstGeom>
+        </p:spPr>
+      </p:pic>
+      <p:pic>
+        <p:nvPicPr>
+          <p:cNvPr id="26" name="Imagen 25">
+            <a:extLst>
+              <a:ext uri="{FF2B5EF4-FFF2-40B4-BE49-F238E27FC236}">
+                <a16:creationId xmlns:a16="http://schemas.microsoft.com/office/drawing/2014/main" id="{5110F737-58B2-F570-21F2-02A0646C631C}"/>
+              </a:ext>
+            </a:extLst>
+          </p:cNvPr>
+          <p:cNvPicPr>
+            <a:picLocks noChangeAspect="1"/>
+          </p:cNvPicPr>
+          <p:nvPr/>
+        </p:nvPicPr>
+        <p:blipFill>
+          <a:blip r:embed="rId10"/>
+          <a:stretch>
+            <a:fillRect/>
+          </a:stretch>
+        </p:blipFill>
+        <p:spPr>
+          <a:xfrm>
+            <a:off x="7315200" y="3429000"/>
+            <a:ext cx="2438400" cy="2438400"/>
+          </a:xfrm>
+          <a:prstGeom prst="rect">
+            <a:avLst/>
+          </a:prstGeom>
+        </p:spPr>
+      </p:pic>
+      <p:pic>
+        <p:nvPicPr>
+          <p:cNvPr id="29" name="Imagen 28">
+            <a:extLst>
+              <a:ext uri="{FF2B5EF4-FFF2-40B4-BE49-F238E27FC236}">
+                <a16:creationId xmlns:a16="http://schemas.microsoft.com/office/drawing/2014/main" id="{A8268AA0-20AF-CC28-E32E-8B5C362757E8}"/>
+              </a:ext>
+            </a:extLst>
+          </p:cNvPr>
+          <p:cNvPicPr>
+            <a:picLocks noChangeAspect="1"/>
+          </p:cNvPicPr>
+          <p:nvPr/>
+        </p:nvPicPr>
+        <p:blipFill>
+          <a:blip r:embed="rId11"/>
+          <a:stretch>
+            <a:fillRect/>
+          </a:stretch>
+        </p:blipFill>
+        <p:spPr>
+          <a:xfrm>
+            <a:off x="9753600" y="3364449"/>
             <a:ext cx="2438400" cy="2438400"/>
           </a:xfrm>
           <a:prstGeom prst="rect">
@@ -3385,6 +3715,717 @@
     <p:extLst>
       <p:ext uri="{BB962C8B-B14F-4D97-AF65-F5344CB8AC3E}">
         <p14:creationId xmlns:p14="http://schemas.microsoft.com/office/powerpoint/2010/main" val="2583016828"/>
+      </p:ext>
+    </p:extLst>
+  </p:cSld>
+  <p:clrMapOvr>
+    <a:masterClrMapping/>
+  </p:clrMapOvr>
+</p:sld>
+</file>
+
+<file path=ppt/slides/slide2.xml><?xml version="1.0" encoding="utf-8"?>
+<p:sld xmlns:a="http://schemas.openxmlformats.org/drawingml/2006/main" xmlns:r="http://schemas.openxmlformats.org/officeDocument/2006/relationships" xmlns:p="http://schemas.openxmlformats.org/presentationml/2006/main">
+  <p:cSld>
+    <p:spTree>
+      <p:nvGrpSpPr>
+        <p:cNvPr id="1" name=""/>
+        <p:cNvGrpSpPr/>
+        <p:nvPr/>
+      </p:nvGrpSpPr>
+      <p:grpSpPr>
+        <a:xfrm>
+          <a:off x="0" y="0"/>
+          <a:ext cx="0" cy="0"/>
+          <a:chOff x="0" y="0"/>
+          <a:chExt cx="0" cy="0"/>
+        </a:xfrm>
+      </p:grpSpPr>
+      <p:pic>
+        <p:nvPicPr>
+          <p:cNvPr id="6" name="Imagen 5">
+            <a:extLst>
+              <a:ext uri="{FF2B5EF4-FFF2-40B4-BE49-F238E27FC236}">
+                <a16:creationId xmlns:a16="http://schemas.microsoft.com/office/drawing/2014/main" id="{6AE3F151-ED65-5383-4AB6-E29FA1756BA7}"/>
+              </a:ext>
+            </a:extLst>
+          </p:cNvPr>
+          <p:cNvPicPr>
+            <a:picLocks noChangeAspect="1"/>
+          </p:cNvPicPr>
+          <p:nvPr/>
+        </p:nvPicPr>
+        <p:blipFill>
+          <a:blip r:embed="rId2"/>
+          <a:stretch>
+            <a:fillRect/>
+          </a:stretch>
+        </p:blipFill>
+        <p:spPr>
+          <a:xfrm>
+            <a:off x="168202" y="1219200"/>
+            <a:ext cx="2438400" cy="2438400"/>
+          </a:xfrm>
+          <a:prstGeom prst="rect">
+            <a:avLst/>
+          </a:prstGeom>
+        </p:spPr>
+      </p:pic>
+      <p:pic>
+        <p:nvPicPr>
+          <p:cNvPr id="9" name="Imagen 8">
+            <a:extLst>
+              <a:ext uri="{FF2B5EF4-FFF2-40B4-BE49-F238E27FC236}">
+                <a16:creationId xmlns:a16="http://schemas.microsoft.com/office/drawing/2014/main" id="{B984F816-CAFA-1F89-7B36-FB876E667B80}"/>
+              </a:ext>
+            </a:extLst>
+          </p:cNvPr>
+          <p:cNvPicPr>
+            <a:picLocks noChangeAspect="1"/>
+          </p:cNvPicPr>
+          <p:nvPr/>
+        </p:nvPicPr>
+        <p:blipFill>
+          <a:blip r:embed="rId3"/>
+          <a:stretch>
+            <a:fillRect/>
+          </a:stretch>
+        </p:blipFill>
+        <p:spPr>
+          <a:xfrm>
+            <a:off x="2658418" y="976201"/>
+            <a:ext cx="2438400" cy="2438400"/>
+          </a:xfrm>
+          <a:prstGeom prst="rect">
+            <a:avLst/>
+          </a:prstGeom>
+        </p:spPr>
+      </p:pic>
+      <p:pic>
+        <p:nvPicPr>
+          <p:cNvPr id="12" name="Imagen 11">
+            <a:extLst>
+              <a:ext uri="{FF2B5EF4-FFF2-40B4-BE49-F238E27FC236}">
+                <a16:creationId xmlns:a16="http://schemas.microsoft.com/office/drawing/2014/main" id="{32D071CA-1191-145F-031A-E4EBB645551F}"/>
+              </a:ext>
+            </a:extLst>
+          </p:cNvPr>
+          <p:cNvPicPr>
+            <a:picLocks noChangeAspect="1"/>
+          </p:cNvPicPr>
+          <p:nvPr/>
+        </p:nvPicPr>
+        <p:blipFill>
+          <a:blip r:embed="rId4"/>
+          <a:stretch>
+            <a:fillRect/>
+          </a:stretch>
+        </p:blipFill>
+        <p:spPr>
+          <a:xfrm>
+            <a:off x="5470358" y="990600"/>
+            <a:ext cx="2438400" cy="2438400"/>
+          </a:xfrm>
+          <a:prstGeom prst="rect">
+            <a:avLst/>
+          </a:prstGeom>
+        </p:spPr>
+      </p:pic>
+      <p:pic>
+        <p:nvPicPr>
+          <p:cNvPr id="37" name="Imagen 36">
+            <a:extLst>
+              <a:ext uri="{FF2B5EF4-FFF2-40B4-BE49-F238E27FC236}">
+                <a16:creationId xmlns:a16="http://schemas.microsoft.com/office/drawing/2014/main" id="{88208D7F-D0BA-A7FD-0774-824659847BF7}"/>
+              </a:ext>
+            </a:extLst>
+          </p:cNvPr>
+          <p:cNvPicPr>
+            <a:picLocks noChangeAspect="1"/>
+          </p:cNvPicPr>
+          <p:nvPr/>
+        </p:nvPicPr>
+        <p:blipFill>
+          <a:blip r:embed="rId5"/>
+          <a:stretch>
+            <a:fillRect/>
+          </a:stretch>
+        </p:blipFill>
+        <p:spPr>
+          <a:xfrm>
+            <a:off x="83419" y="4028174"/>
+            <a:ext cx="2438400" cy="2438400"/>
+          </a:xfrm>
+          <a:prstGeom prst="rect">
+            <a:avLst/>
+          </a:prstGeom>
+        </p:spPr>
+      </p:pic>
+      <p:pic>
+        <p:nvPicPr>
+          <p:cNvPr id="40" name="Imagen 39">
+            <a:extLst>
+              <a:ext uri="{FF2B5EF4-FFF2-40B4-BE49-F238E27FC236}">
+                <a16:creationId xmlns:a16="http://schemas.microsoft.com/office/drawing/2014/main" id="{A4E972EB-3FF7-2C9D-4F5D-4E3578D7EE62}"/>
+              </a:ext>
+            </a:extLst>
+          </p:cNvPr>
+          <p:cNvPicPr>
+            <a:picLocks noChangeAspect="1"/>
+          </p:cNvPicPr>
+          <p:nvPr/>
+        </p:nvPicPr>
+        <p:blipFill>
+          <a:blip r:embed="rId6"/>
+          <a:stretch>
+            <a:fillRect/>
+          </a:stretch>
+        </p:blipFill>
+        <p:spPr>
+          <a:xfrm>
+            <a:off x="2499360" y="4279638"/>
+            <a:ext cx="2438400" cy="2438400"/>
+          </a:xfrm>
+          <a:prstGeom prst="rect">
+            <a:avLst/>
+          </a:prstGeom>
+        </p:spPr>
+      </p:pic>
+      <p:pic>
+        <p:nvPicPr>
+          <p:cNvPr id="43" name="Imagen 42">
+            <a:extLst>
+              <a:ext uri="{FF2B5EF4-FFF2-40B4-BE49-F238E27FC236}">
+                <a16:creationId xmlns:a16="http://schemas.microsoft.com/office/drawing/2014/main" id="{2291AF5E-F520-2C3A-6EB3-491DF556F720}"/>
+              </a:ext>
+            </a:extLst>
+          </p:cNvPr>
+          <p:cNvPicPr>
+            <a:picLocks noChangeAspect="1"/>
+          </p:cNvPicPr>
+          <p:nvPr/>
+        </p:nvPicPr>
+        <p:blipFill>
+          <a:blip r:embed="rId7"/>
+          <a:stretch>
+            <a:fillRect/>
+          </a:stretch>
+        </p:blipFill>
+        <p:spPr>
+          <a:xfrm>
+            <a:off x="5104598" y="4028174"/>
+            <a:ext cx="2438400" cy="2438400"/>
+          </a:xfrm>
+          <a:prstGeom prst="rect">
+            <a:avLst/>
+          </a:prstGeom>
+        </p:spPr>
+      </p:pic>
+      <p:sp>
+        <p:nvSpPr>
+          <p:cNvPr id="44" name="CuadroTexto 43">
+            <a:extLst>
+              <a:ext uri="{FF2B5EF4-FFF2-40B4-BE49-F238E27FC236}">
+                <a16:creationId xmlns:a16="http://schemas.microsoft.com/office/drawing/2014/main" id="{417EA743-9451-64AB-CA87-9889B2B80F3E}"/>
+              </a:ext>
+            </a:extLst>
+          </p:cNvPr>
+          <p:cNvSpPr txBox="1"/>
+          <p:nvPr/>
+        </p:nvSpPr>
+        <p:spPr>
+          <a:xfrm>
+            <a:off x="252984" y="139962"/>
+            <a:ext cx="2542032" cy="584775"/>
+          </a:xfrm>
+          <a:prstGeom prst="rect">
+            <a:avLst/>
+          </a:prstGeom>
+          <a:noFill/>
+        </p:spPr>
+        <p:txBody>
+          <a:bodyPr wrap="square" rtlCol="0">
+            <a:spAutoFit/>
+          </a:bodyPr>
+          <a:lstStyle/>
+          <a:p>
+            <a:r>
+              <a:rPr lang="es-ES" sz="3200" dirty="0">
+                <a:latin typeface="Algerian" panose="04020705040A02060702" pitchFamily="82" charset="0"/>
+              </a:rPr>
+              <a:t>SKILLS</a:t>
+            </a:r>
+          </a:p>
+        </p:txBody>
+      </p:sp>
+    </p:spTree>
+    <p:extLst>
+      <p:ext uri="{BB962C8B-B14F-4D97-AF65-F5344CB8AC3E}">
+        <p14:creationId xmlns:p14="http://schemas.microsoft.com/office/powerpoint/2010/main" val="1676645215"/>
+      </p:ext>
+    </p:extLst>
+  </p:cSld>
+  <p:clrMapOvr>
+    <a:masterClrMapping/>
+  </p:clrMapOvr>
+</p:sld>
+</file>
+
+<file path=ppt/slides/slide3.xml><?xml version="1.0" encoding="utf-8"?>
+<p:sld xmlns:a="http://schemas.openxmlformats.org/drawingml/2006/main" xmlns:r="http://schemas.openxmlformats.org/officeDocument/2006/relationships" xmlns:p="http://schemas.openxmlformats.org/presentationml/2006/main">
+  <p:cSld>
+    <p:spTree>
+      <p:nvGrpSpPr>
+        <p:cNvPr id="1" name=""/>
+        <p:cNvGrpSpPr/>
+        <p:nvPr/>
+      </p:nvGrpSpPr>
+      <p:grpSpPr>
+        <a:xfrm>
+          <a:off x="0" y="0"/>
+          <a:ext cx="0" cy="0"/>
+          <a:chOff x="0" y="0"/>
+          <a:chExt cx="0" cy="0"/>
+        </a:xfrm>
+      </p:grpSpPr>
+      <p:pic>
+        <p:nvPicPr>
+          <p:cNvPr id="6" name="Imagen 5">
+            <a:extLst>
+              <a:ext uri="{FF2B5EF4-FFF2-40B4-BE49-F238E27FC236}">
+                <a16:creationId xmlns:a16="http://schemas.microsoft.com/office/drawing/2014/main" id="{46BEA329-D67E-10E8-D6E0-0F5282FCBF9E}"/>
+              </a:ext>
+            </a:extLst>
+          </p:cNvPr>
+          <p:cNvPicPr>
+            <a:picLocks noChangeAspect="1"/>
+          </p:cNvPicPr>
+          <p:nvPr/>
+        </p:nvPicPr>
+        <p:blipFill>
+          <a:blip r:embed="rId2"/>
+          <a:stretch>
+            <a:fillRect/>
+          </a:stretch>
+        </p:blipFill>
+        <p:spPr>
+          <a:xfrm>
+            <a:off x="7446744" y="3545305"/>
+            <a:ext cx="2438400" cy="2438400"/>
+          </a:xfrm>
+          <a:prstGeom prst="rect">
+            <a:avLst/>
+          </a:prstGeom>
+        </p:spPr>
+      </p:pic>
+      <p:pic>
+        <p:nvPicPr>
+          <p:cNvPr id="7" name="Imagen 6">
+            <a:extLst>
+              <a:ext uri="{FF2B5EF4-FFF2-40B4-BE49-F238E27FC236}">
+                <a16:creationId xmlns:a16="http://schemas.microsoft.com/office/drawing/2014/main" id="{45DBEE93-2367-1C63-AE43-971B6D910158}"/>
+              </a:ext>
+            </a:extLst>
+          </p:cNvPr>
+          <p:cNvPicPr>
+            <a:picLocks noChangeAspect="1"/>
+          </p:cNvPicPr>
+          <p:nvPr/>
+        </p:nvPicPr>
+        <p:blipFill>
+          <a:blip r:embed="rId3"/>
+          <a:stretch>
+            <a:fillRect/>
+          </a:stretch>
+        </p:blipFill>
+        <p:spPr>
+          <a:xfrm>
+            <a:off x="5173337" y="1248878"/>
+            <a:ext cx="2438400" cy="2438400"/>
+          </a:xfrm>
+          <a:prstGeom prst="rect">
+            <a:avLst/>
+          </a:prstGeom>
+        </p:spPr>
+      </p:pic>
+      <p:pic>
+        <p:nvPicPr>
+          <p:cNvPr id="8" name="Imagen 7">
+            <a:extLst>
+              <a:ext uri="{FF2B5EF4-FFF2-40B4-BE49-F238E27FC236}">
+                <a16:creationId xmlns:a16="http://schemas.microsoft.com/office/drawing/2014/main" id="{4B0C8AC4-CCC8-E110-ED70-CAC1902BA466}"/>
+              </a:ext>
+            </a:extLst>
+          </p:cNvPr>
+          <p:cNvPicPr>
+            <a:picLocks noChangeAspect="1"/>
+          </p:cNvPicPr>
+          <p:nvPr/>
+        </p:nvPicPr>
+        <p:blipFill>
+          <a:blip r:embed="rId4"/>
+          <a:stretch>
+            <a:fillRect/>
+          </a:stretch>
+        </p:blipFill>
+        <p:spPr>
+          <a:xfrm>
+            <a:off x="7529241" y="1098884"/>
+            <a:ext cx="2438400" cy="2438400"/>
+          </a:xfrm>
+          <a:prstGeom prst="rect">
+            <a:avLst/>
+          </a:prstGeom>
+        </p:spPr>
+      </p:pic>
+      <p:pic>
+        <p:nvPicPr>
+          <p:cNvPr id="9" name="Imagen 8">
+            <a:extLst>
+              <a:ext uri="{FF2B5EF4-FFF2-40B4-BE49-F238E27FC236}">
+                <a16:creationId xmlns:a16="http://schemas.microsoft.com/office/drawing/2014/main" id="{EC3B55FC-70FA-09B4-919A-4D29DE7C0A03}"/>
+              </a:ext>
+            </a:extLst>
+          </p:cNvPr>
+          <p:cNvPicPr>
+            <a:picLocks noChangeAspect="1"/>
+          </p:cNvPicPr>
+          <p:nvPr/>
+        </p:nvPicPr>
+        <p:blipFill>
+          <a:blip r:embed="rId5"/>
+          <a:stretch>
+            <a:fillRect/>
+          </a:stretch>
+        </p:blipFill>
+        <p:spPr>
+          <a:xfrm>
+            <a:off x="131545" y="3545305"/>
+            <a:ext cx="2438400" cy="2438400"/>
+          </a:xfrm>
+          <a:prstGeom prst="rect">
+            <a:avLst/>
+          </a:prstGeom>
+        </p:spPr>
+      </p:pic>
+      <p:pic>
+        <p:nvPicPr>
+          <p:cNvPr id="10" name="Imagen 9">
+            <a:extLst>
+              <a:ext uri="{FF2B5EF4-FFF2-40B4-BE49-F238E27FC236}">
+                <a16:creationId xmlns:a16="http://schemas.microsoft.com/office/drawing/2014/main" id="{D7291A97-5515-CAB1-481A-3F44FEF7E9A8}"/>
+              </a:ext>
+            </a:extLst>
+          </p:cNvPr>
+          <p:cNvPicPr>
+            <a:picLocks noChangeAspect="1"/>
+          </p:cNvPicPr>
+          <p:nvPr/>
+        </p:nvPicPr>
+        <p:blipFill>
+          <a:blip r:embed="rId6"/>
+          <a:stretch>
+            <a:fillRect/>
+          </a:stretch>
+        </p:blipFill>
+        <p:spPr>
+          <a:xfrm>
+            <a:off x="2569945" y="3643964"/>
+            <a:ext cx="2438400" cy="2438400"/>
+          </a:xfrm>
+          <a:prstGeom prst="rect">
+            <a:avLst/>
+          </a:prstGeom>
+        </p:spPr>
+      </p:pic>
+      <p:pic>
+        <p:nvPicPr>
+          <p:cNvPr id="11" name="Imagen 10">
+            <a:extLst>
+              <a:ext uri="{FF2B5EF4-FFF2-40B4-BE49-F238E27FC236}">
+                <a16:creationId xmlns:a16="http://schemas.microsoft.com/office/drawing/2014/main" id="{764E23B0-A375-A948-1C98-023DB4AF32D9}"/>
+              </a:ext>
+            </a:extLst>
+          </p:cNvPr>
+          <p:cNvPicPr>
+            <a:picLocks noChangeAspect="1"/>
+          </p:cNvPicPr>
+          <p:nvPr/>
+        </p:nvPicPr>
+        <p:blipFill>
+          <a:blip r:embed="rId7"/>
+          <a:stretch>
+            <a:fillRect/>
+          </a:stretch>
+        </p:blipFill>
+        <p:spPr>
+          <a:xfrm>
+            <a:off x="186089" y="1008246"/>
+            <a:ext cx="2438400" cy="2438400"/>
+          </a:xfrm>
+          <a:prstGeom prst="rect">
+            <a:avLst/>
+          </a:prstGeom>
+        </p:spPr>
+      </p:pic>
+      <p:pic>
+        <p:nvPicPr>
+          <p:cNvPr id="12" name="Imagen 11">
+            <a:extLst>
+              <a:ext uri="{FF2B5EF4-FFF2-40B4-BE49-F238E27FC236}">
+                <a16:creationId xmlns:a16="http://schemas.microsoft.com/office/drawing/2014/main" id="{0FA9385C-9346-F03A-CD28-648BF13BE515}"/>
+              </a:ext>
+            </a:extLst>
+          </p:cNvPr>
+          <p:cNvPicPr>
+            <a:picLocks noChangeAspect="1"/>
+          </p:cNvPicPr>
+          <p:nvPr/>
+        </p:nvPicPr>
+        <p:blipFill>
+          <a:blip r:embed="rId8"/>
+          <a:stretch>
+            <a:fillRect/>
+          </a:stretch>
+        </p:blipFill>
+        <p:spPr>
+          <a:xfrm>
+            <a:off x="2789481" y="1150219"/>
+            <a:ext cx="2438400" cy="2438400"/>
+          </a:xfrm>
+          <a:prstGeom prst="rect">
+            <a:avLst/>
+          </a:prstGeom>
+        </p:spPr>
+      </p:pic>
+      <p:pic>
+        <p:nvPicPr>
+          <p:cNvPr id="13" name="Imagen 12">
+            <a:extLst>
+              <a:ext uri="{FF2B5EF4-FFF2-40B4-BE49-F238E27FC236}">
+                <a16:creationId xmlns:a16="http://schemas.microsoft.com/office/drawing/2014/main" id="{52DA095C-087B-AD2A-A79D-17968884B1CC}"/>
+              </a:ext>
+            </a:extLst>
+          </p:cNvPr>
+          <p:cNvPicPr>
+            <a:picLocks noChangeAspect="1"/>
+          </p:cNvPicPr>
+          <p:nvPr/>
+        </p:nvPicPr>
+        <p:blipFill>
+          <a:blip r:embed="rId9"/>
+          <a:stretch>
+            <a:fillRect/>
+          </a:stretch>
+        </p:blipFill>
+        <p:spPr>
+          <a:xfrm>
+            <a:off x="5227881" y="3643964"/>
+            <a:ext cx="2438400" cy="2438400"/>
+          </a:xfrm>
+          <a:prstGeom prst="rect">
+            <a:avLst/>
+          </a:prstGeom>
+        </p:spPr>
+      </p:pic>
+      <p:sp>
+        <p:nvSpPr>
+          <p:cNvPr id="14" name="CuadroTexto 13">
+            <a:extLst>
+              <a:ext uri="{FF2B5EF4-FFF2-40B4-BE49-F238E27FC236}">
+                <a16:creationId xmlns:a16="http://schemas.microsoft.com/office/drawing/2014/main" id="{7AE0094B-CBDE-064A-0FF9-F0CA758C8555}"/>
+              </a:ext>
+            </a:extLst>
+          </p:cNvPr>
+          <p:cNvSpPr txBox="1"/>
+          <p:nvPr/>
+        </p:nvSpPr>
+        <p:spPr>
+          <a:xfrm>
+            <a:off x="252983" y="139962"/>
+            <a:ext cx="7193761" cy="584775"/>
+          </a:xfrm>
+          <a:prstGeom prst="rect">
+            <a:avLst/>
+          </a:prstGeom>
+          <a:noFill/>
+        </p:spPr>
+        <p:txBody>
+          <a:bodyPr wrap="square" rtlCol="0">
+            <a:spAutoFit/>
+          </a:bodyPr>
+          <a:lstStyle/>
+          <a:p>
+            <a:r>
+              <a:rPr lang="es-ES" sz="3200" dirty="0">
+                <a:latin typeface="Algerian" panose="04020705040A02060702" pitchFamily="82" charset="0"/>
+              </a:rPr>
+              <a:t>SKILLS disponibles en la tienda</a:t>
+            </a:r>
+          </a:p>
+        </p:txBody>
+      </p:sp>
+    </p:spTree>
+    <p:extLst>
+      <p:ext uri="{BB962C8B-B14F-4D97-AF65-F5344CB8AC3E}">
+        <p14:creationId xmlns:p14="http://schemas.microsoft.com/office/powerpoint/2010/main" val="3300329491"/>
+      </p:ext>
+    </p:extLst>
+  </p:cSld>
+  <p:clrMapOvr>
+    <a:masterClrMapping/>
+  </p:clrMapOvr>
+</p:sld>
+</file>
+
+<file path=ppt/slides/slide4.xml><?xml version="1.0" encoding="utf-8"?>
+<p:sld xmlns:a="http://schemas.openxmlformats.org/drawingml/2006/main" xmlns:r="http://schemas.openxmlformats.org/officeDocument/2006/relationships" xmlns:p="http://schemas.openxmlformats.org/presentationml/2006/main">
+  <p:cSld>
+    <p:spTree>
+      <p:nvGrpSpPr>
+        <p:cNvPr id="1" name=""/>
+        <p:cNvGrpSpPr/>
+        <p:nvPr/>
+      </p:nvGrpSpPr>
+      <p:grpSpPr>
+        <a:xfrm>
+          <a:off x="0" y="0"/>
+          <a:ext cx="0" cy="0"/>
+          <a:chOff x="0" y="0"/>
+          <a:chExt cx="0" cy="0"/>
+        </a:xfrm>
+      </p:grpSpPr>
+      <p:pic>
+        <p:nvPicPr>
+          <p:cNvPr id="6" name="Imagen 5">
+            <a:extLst>
+              <a:ext uri="{FF2B5EF4-FFF2-40B4-BE49-F238E27FC236}">
+                <a16:creationId xmlns:a16="http://schemas.microsoft.com/office/drawing/2014/main" id="{94A486F4-4DB5-B653-81A2-9222BCF120EC}"/>
+              </a:ext>
+            </a:extLst>
+          </p:cNvPr>
+          <p:cNvPicPr>
+            <a:picLocks noChangeAspect="1"/>
+          </p:cNvPicPr>
+          <p:nvPr/>
+        </p:nvPicPr>
+        <p:blipFill>
+          <a:blip r:embed="rId2"/>
+          <a:stretch>
+            <a:fillRect/>
+          </a:stretch>
+        </p:blipFill>
+        <p:spPr>
+          <a:xfrm>
+            <a:off x="73794" y="1459030"/>
+            <a:ext cx="2438400" cy="2438400"/>
+          </a:xfrm>
+          <a:prstGeom prst="rect">
+            <a:avLst/>
+          </a:prstGeom>
+        </p:spPr>
+      </p:pic>
+      <p:pic>
+        <p:nvPicPr>
+          <p:cNvPr id="9" name="Imagen 8">
+            <a:extLst>
+              <a:ext uri="{FF2B5EF4-FFF2-40B4-BE49-F238E27FC236}">
+                <a16:creationId xmlns:a16="http://schemas.microsoft.com/office/drawing/2014/main" id="{F120AD4B-4FFC-50DA-9684-C2FA618FDBD9}"/>
+              </a:ext>
+            </a:extLst>
+          </p:cNvPr>
+          <p:cNvPicPr>
+            <a:picLocks noChangeAspect="1"/>
+          </p:cNvPicPr>
+          <p:nvPr/>
+        </p:nvPicPr>
+        <p:blipFill>
+          <a:blip r:embed="rId3"/>
+          <a:stretch>
+            <a:fillRect/>
+          </a:stretch>
+        </p:blipFill>
+        <p:spPr>
+          <a:xfrm>
+            <a:off x="2730366" y="1372402"/>
+            <a:ext cx="2438400" cy="2438400"/>
+          </a:xfrm>
+          <a:prstGeom prst="rect">
+            <a:avLst/>
+          </a:prstGeom>
+        </p:spPr>
+      </p:pic>
+      <p:pic>
+        <p:nvPicPr>
+          <p:cNvPr id="12" name="Imagen 11">
+            <a:extLst>
+              <a:ext uri="{FF2B5EF4-FFF2-40B4-BE49-F238E27FC236}">
+                <a16:creationId xmlns:a16="http://schemas.microsoft.com/office/drawing/2014/main" id="{8064A471-36F6-BDCF-9397-E1EAB338D803}"/>
+              </a:ext>
+            </a:extLst>
+          </p:cNvPr>
+          <p:cNvPicPr>
+            <a:picLocks noChangeAspect="1"/>
+          </p:cNvPicPr>
+          <p:nvPr/>
+        </p:nvPicPr>
+        <p:blipFill>
+          <a:blip r:embed="rId4"/>
+          <a:stretch>
+            <a:fillRect/>
+          </a:stretch>
+        </p:blipFill>
+        <p:spPr>
+          <a:xfrm>
+            <a:off x="5386938" y="1228023"/>
+            <a:ext cx="2438400" cy="2438400"/>
+          </a:xfrm>
+          <a:prstGeom prst="rect">
+            <a:avLst/>
+          </a:prstGeom>
+        </p:spPr>
+      </p:pic>
+      <p:sp>
+        <p:nvSpPr>
+          <p:cNvPr id="13" name="CuadroTexto 12">
+            <a:extLst>
+              <a:ext uri="{FF2B5EF4-FFF2-40B4-BE49-F238E27FC236}">
+                <a16:creationId xmlns:a16="http://schemas.microsoft.com/office/drawing/2014/main" id="{DF00BDE0-05BA-8B3B-1DE3-7BF29A4E33C3}"/>
+              </a:ext>
+            </a:extLst>
+          </p:cNvPr>
+          <p:cNvSpPr txBox="1"/>
+          <p:nvPr/>
+        </p:nvSpPr>
+        <p:spPr>
+          <a:xfrm>
+            <a:off x="252983" y="139962"/>
+            <a:ext cx="7193761" cy="584775"/>
+          </a:xfrm>
+          <a:prstGeom prst="rect">
+            <a:avLst/>
+          </a:prstGeom>
+          <a:noFill/>
+        </p:spPr>
+        <p:txBody>
+          <a:bodyPr wrap="square" rtlCol="0">
+            <a:spAutoFit/>
+          </a:bodyPr>
+          <a:lstStyle/>
+          <a:p>
+            <a:r>
+              <a:rPr lang="es-ES" sz="3200" dirty="0">
+                <a:latin typeface="Algerian" panose="04020705040A02060702" pitchFamily="82" charset="0"/>
+              </a:rPr>
+              <a:t>SKILLS disponibles en la tienda</a:t>
+            </a:r>
+          </a:p>
+        </p:txBody>
+      </p:sp>
+    </p:spTree>
+    <p:extLst>
+      <p:ext uri="{BB962C8B-B14F-4D97-AF65-F5344CB8AC3E}">
+        <p14:creationId xmlns:p14="http://schemas.microsoft.com/office/powerpoint/2010/main" val="1015513204"/>
       </p:ext>
     </p:extLst>
   </p:cSld>
